--- a/data/09_internal_training/training_10.pptx
+++ b/data/09_internal_training/training_10.pptx
@@ -3140,51 +3140,56 @@
           <a:p/>
           <a:p>
             <a:r>
-              <a:t>风险管理部认为，医疗科技 行业仍然面临若干</a:t>
-            </a:r>
-          </a:p>
-          <a:p>
-            <a:r>
-              <a:t>不确定性因素，包括技术迭代风险、政策变化、</a:t>
-            </a:r>
-          </a:p>
-          <a:p>
-            <a:r>
-              <a:t>以及市场竞争加剧等问题。</a:t>
-            </a:r>
-          </a:p>
-          <a:p/>
-          <a:p/>
-          <a:p>
-            <a:r>
-              <a:t>风险管理部认为，云计算 行业仍然面临若干</a:t>
-            </a:r>
-          </a:p>
-          <a:p>
-            <a:r>
-              <a:t>不确定性因素，包括技术迭代风险、政策变化、</a:t>
-            </a:r>
-          </a:p>
-          <a:p>
-            <a:r>
-              <a:t>以及市场竞争加剧等问题。</a:t>
-            </a:r>
-          </a:p>
-          <a:p/>
-          <a:p/>
-          <a:p>
-            <a:r>
-              <a:t>鸿睿思博网络有限公司 是中国 新能源 行业的重要企业之一。</a:t>
-            </a:r>
-          </a:p>
-          <a:p>
-            <a:r>
-              <a:t>根据华辰资本 资产配置委员会 的研究，该公司成立于 2015 年，</a:t>
-            </a:r>
-          </a:p>
-          <a:p>
-            <a:r>
-              <a:t>目前员工规模约 1240 人。公司近年来持续加大研发投入，</a:t>
+              <a:t>艾提科信科技有限公司 是中国 云计算 行业的重要企业之一。</a:t>
+            </a:r>
+          </a:p>
+          <a:p>
+            <a:r>
+              <a:t>根据华辰资本 投资策略部 的研究，该公司成立于 2006 年，</a:t>
+            </a:r>
+          </a:p>
+          <a:p>
+            <a:r>
+              <a:t>目前员工规模约 3804 人。公司近年来持续加大研发投入，</a:t>
+            </a:r>
+          </a:p>
+          <a:p>
+            <a:r>
+              <a:t>在核心技术方面形成了较强的竞争壁垒。</a:t>
+            </a:r>
+          </a:p>
+          <a:p/>
+          <a:p/>
+          <a:p>
+            <a:r>
+              <a:t>从产业链角度看，云计算 行业主要由上游设备厂商、</a:t>
+            </a:r>
+          </a:p>
+          <a:p>
+            <a:r>
+              <a:t>中游平台企业以及下游应用厂商组成。</a:t>
+            </a:r>
+          </a:p>
+          <a:p>
+            <a:r>
+              <a:t>信诚致远科技有限公司 主要位于产业链的 上游 环节。</a:t>
+            </a:r>
+          </a:p>
+          <a:p/>
+          <a:p/>
+          <a:p>
+            <a:r>
+              <a:t>良诺科技有限公司 是中国 云计算 行业的重要企业之一。</a:t>
+            </a:r>
+          </a:p>
+          <a:p>
+            <a:r>
+              <a:t>根据华辰资本 投资委员会 的研究，该公司成立于 2016 年，</a:t>
+            </a:r>
+          </a:p>
+          <a:p>
+            <a:r>
+              <a:t>目前员工规模约 1663 人。公司近年来持续加大研发投入，</a:t>
             </a:r>
           </a:p>
           <a:p>
@@ -3251,7 +3256,7 @@
           <a:p/>
           <a:p>
             <a:r>
-              <a:t>从产业链角度看，机器人 行业主要由上游设备厂商、</a:t>
+              <a:t>从产业链角度看，医疗科技 行业主要由上游设备厂商、</a:t>
             </a:r>
           </a:p>
           <a:p>
@@ -3261,14 +3266,14 @@
           </a:p>
           <a:p>
             <a:r>
-              <a:t>新宇龙信息传媒有限公司 主要位于产业链的 下游 环节。</a:t>
-            </a:r>
-          </a:p>
-          <a:p/>
-          <a:p/>
-          <a:p>
-            <a:r>
-              <a:t>从产业链角度看，半导体 行业主要由上游设备厂商、</a:t>
+              <a:t>华成育卓科技有限公司 主要位于产业链的 上游 环节。</a:t>
+            </a:r>
+          </a:p>
+          <a:p/>
+          <a:p/>
+          <a:p>
+            <a:r>
+              <a:t>从产业链角度看，消费科技 行业主要由上游设备厂商、</a:t>
             </a:r>
           </a:p>
           <a:p>
@@ -3278,24 +3283,24 @@
           </a:p>
           <a:p>
             <a:r>
-              <a:t>佳禾科技有限公司 主要位于产业链的 上游 环节。</a:t>
-            </a:r>
-          </a:p>
-          <a:p/>
-          <a:p/>
-          <a:p>
-            <a:r>
-              <a:t>华辰资本旗下的 HC Global Macro Fund 在最近的资产配置会议中</a:t>
-            </a:r>
-          </a:p>
-          <a:p>
-            <a:r>
-              <a:t>讨论了 新能源 行业的投资机会，并对 昊嘉网络有限公司</a:t>
-            </a:r>
-          </a:p>
-          <a:p>
-            <a:r>
-              <a:t>进行了重点评估。</a:t>
+              <a:t>鑫博腾飞信息有限公司 主要位于产业链的 下游 环节。</a:t>
+            </a:r>
+          </a:p>
+          <a:p/>
+          <a:p/>
+          <a:p>
+            <a:r>
+              <a:t>风险管理部认为，新能源 行业仍然面临若干</a:t>
+            </a:r>
+          </a:p>
+          <a:p>
+            <a:r>
+              <a:t>不确定性因素，包括技术迭代风险、政策变化、</a:t>
+            </a:r>
+          </a:p>
+          <a:p>
+            <a:r>
+              <a:t>以及市场竞争加剧等问题。</a:t>
             </a:r>
           </a:p>
           <a:p/>
@@ -3357,34 +3362,17 @@
           <a:p/>
           <a:p>
             <a:r>
-              <a:t>风险管理部认为，消费科技 行业仍然面临若干</a:t>
-            </a:r>
-          </a:p>
-          <a:p>
-            <a:r>
-              <a:t>不确定性因素，包括技术迭代风险、政策变化、</a:t>
-            </a:r>
-          </a:p>
-          <a:p>
-            <a:r>
-              <a:t>以及市场竞争加剧等问题。</a:t>
-            </a:r>
-          </a:p>
-          <a:p/>
-          <a:p/>
-          <a:p>
-            <a:r>
-              <a:t>创亿网络有限公司 是中国 云计算 行业的重要企业之一。</a:t>
-            </a:r>
-          </a:p>
-          <a:p>
-            <a:r>
-              <a:t>根据华辰资本 资产配置委员会 的研究，该公司成立于 2010 年，</a:t>
-            </a:r>
-          </a:p>
-          <a:p>
-            <a:r>
-              <a:t>目前员工规模约 4041 人。公司近年来持续加大研发投入，</a:t>
+              <a:t>昊嘉科技有限公司 是中国 医疗科技 行业的重要企业之一。</a:t>
+            </a:r>
+          </a:p>
+          <a:p>
+            <a:r>
+              <a:t>根据华辰资本 投资策略部 的研究，该公司成立于 2006 年，</a:t>
+            </a:r>
+          </a:p>
+          <a:p>
+            <a:r>
+              <a:t>目前员工规模约 7977 人。公司近年来持续加大研发投入，</a:t>
             </a:r>
           </a:p>
           <a:p>
@@ -3396,17 +3384,39 @@
           <a:p/>
           <a:p>
             <a:r>
-              <a:t>风险管理部认为，云计算 行业仍然面临若干</a:t>
-            </a:r>
-          </a:p>
-          <a:p>
-            <a:r>
-              <a:t>不确定性因素，包括技术迭代风险、政策变化、</a:t>
-            </a:r>
-          </a:p>
-          <a:p>
-            <a:r>
-              <a:t>以及市场竞争加剧等问题。</a:t>
+              <a:t>图龙信息传媒有限公司 是中国 机器人 行业的重要企业之一。</a:t>
+            </a:r>
+          </a:p>
+          <a:p>
+            <a:r>
+              <a:t>根据华辰资本 量化研究部 的研究，该公司成立于 2007 年，</a:t>
+            </a:r>
+          </a:p>
+          <a:p>
+            <a:r>
+              <a:t>目前员工规模约 2000 人。公司近年来持续加大研发投入，</a:t>
+            </a:r>
+          </a:p>
+          <a:p>
+            <a:r>
+              <a:t>在核心技术方面形成了较强的竞争壁垒。</a:t>
+            </a:r>
+          </a:p>
+          <a:p/>
+          <a:p/>
+          <a:p>
+            <a:r>
+              <a:t>根据内部财务模型测算，鑫博腾飞信息有限公司 在未来三年</a:t>
+            </a:r>
+          </a:p>
+          <a:p>
+            <a:r>
+              <a:t>收入复合增长率预计可达到 27% 左右。</a:t>
+            </a:r>
+          </a:p>
+          <a:p>
+            <a:r>
+              <a:t>该预测基于行业需求增长以及公司产能扩张计划。</a:t>
             </a:r>
           </a:p>
           <a:p/>
@@ -3468,12 +3478,29 @@
           <a:p/>
           <a:p>
             <a:r>
-              <a:t>华辰资本旗下的 HC Quant Arbitrage Fund 在最近的资产配置会议中</a:t>
-            </a:r>
-          </a:p>
-          <a:p>
-            <a:r>
-              <a:t>讨论了 云计算 行业的投资机会，并对 立信电子网络有限公司</a:t>
+              <a:t>风险管理部认为，新能源 行业仍然面临若干</a:t>
+            </a:r>
+          </a:p>
+          <a:p>
+            <a:r>
+              <a:t>不确定性因素，包括技术迭代风险、政策变化、</a:t>
+            </a:r>
+          </a:p>
+          <a:p>
+            <a:r>
+              <a:t>以及市场竞争加剧等问题。</a:t>
+            </a:r>
+          </a:p>
+          <a:p/>
+          <a:p/>
+          <a:p>
+            <a:r>
+              <a:t>华辰资本旗下的 HC AI Innovation Fund 在最近的资产配置会议中</a:t>
+            </a:r>
+          </a:p>
+          <a:p>
+            <a:r>
+              <a:t>讨论了 半导体 行业的投资机会，并对 信诚致远网络有限公司</a:t>
             </a:r>
           </a:p>
           <a:p>
@@ -3485,34 +3512,22 @@
           <a:p/>
           <a:p>
             <a:r>
-              <a:t>风险管理部认为，新能源 行业仍然面临若干</a:t>
-            </a:r>
-          </a:p>
-          <a:p>
-            <a:r>
-              <a:t>不确定性因素，包括技术迭代风险、政策变化、</a:t>
-            </a:r>
-          </a:p>
-          <a:p>
-            <a:r>
-              <a:t>以及市场竞争加剧等问题。</a:t>
-            </a:r>
-          </a:p>
-          <a:p/>
-          <a:p/>
-          <a:p>
-            <a:r>
-              <a:t>华辰资本旗下的 HC Energy Transition Fund 在最近的资产配置会议中</a:t>
-            </a:r>
-          </a:p>
-          <a:p>
-            <a:r>
-              <a:t>讨论了 医疗科技 行业的投资机会，并对 创联世纪科技有限公司</a:t>
-            </a:r>
-          </a:p>
-          <a:p>
-            <a:r>
-              <a:t>进行了重点评估。</a:t>
+              <a:t>昂歌信息信息有限公司 是中国 消费科技 行业的重要企业之一。</a:t>
+            </a:r>
+          </a:p>
+          <a:p>
+            <a:r>
+              <a:t>根据华辰资本 投资委员会 的研究，该公司成立于 2010 年，</a:t>
+            </a:r>
+          </a:p>
+          <a:p>
+            <a:r>
+              <a:t>目前员工规模约 7892 人。公司近年来持续加大研发投入，</a:t>
+            </a:r>
+          </a:p>
+          <a:p>
+            <a:r>
+              <a:t>在核心技术方面形成了较强的竞争壁垒。</a:t>
             </a:r>
           </a:p>
           <a:p/>
@@ -3574,17 +3589,17 @@
           <a:p/>
           <a:p>
             <a:r>
-              <a:t>浦华众城信息有限公司 是中国 云计算 行业的重要企业之一。</a:t>
-            </a:r>
-          </a:p>
-          <a:p>
-            <a:r>
-              <a:t>根据华辰资本 投资策略部 的研究，该公司成立于 2015 年，</a:t>
-            </a:r>
-          </a:p>
-          <a:p>
-            <a:r>
-              <a:t>目前员工规模约 2962 人。公司近年来持续加大研发投入，</a:t>
+              <a:t>联软网络有限公司 是中国 半导体 行业的重要企业之一。</a:t>
+            </a:r>
+          </a:p>
+          <a:p>
+            <a:r>
+              <a:t>根据华辰资本 量化研究部 的研究，该公司成立于 2012 年，</a:t>
+            </a:r>
+          </a:p>
+          <a:p>
+            <a:r>
+              <a:t>目前员工规模约 5582 人。公司近年来持续加大研发投入，</a:t>
             </a:r>
           </a:p>
           <a:p>
@@ -3596,39 +3611,34 @@
           <a:p/>
           <a:p>
             <a:r>
-              <a:t>凌云网络有限公司 是中国 医疗科技 行业的重要企业之一。</a:t>
-            </a:r>
-          </a:p>
-          <a:p>
-            <a:r>
-              <a:t>根据华辰资本 投资策略部 的研究，该公司成立于 2020 年，</a:t>
-            </a:r>
-          </a:p>
-          <a:p>
-            <a:r>
-              <a:t>目前员工规模约 730 人。公司近年来持续加大研发投入，</a:t>
-            </a:r>
-          </a:p>
-          <a:p>
-            <a:r>
-              <a:t>在核心技术方面形成了较强的竞争壁垒。</a:t>
-            </a:r>
-          </a:p>
-          <a:p/>
-          <a:p/>
-          <a:p>
-            <a:r>
-              <a:t>华辰资本旗下的 HC Global Macro Fund 在最近的资产配置会议中</a:t>
-            </a:r>
-          </a:p>
-          <a:p>
-            <a:r>
-              <a:t>讨论了 云计算 行业的投资机会，并对 立信电子网络有限公司</a:t>
-            </a:r>
-          </a:p>
-          <a:p>
-            <a:r>
-              <a:t>进行了重点评估。</a:t>
+              <a:t>从产业链角度看，机器人 行业主要由上游设备厂商、</a:t>
+            </a:r>
+          </a:p>
+          <a:p>
+            <a:r>
+              <a:t>中游平台企业以及下游应用厂商组成。</a:t>
+            </a:r>
+          </a:p>
+          <a:p>
+            <a:r>
+              <a:t>通际名联网络有限公司 主要位于产业链的 中游 环节。</a:t>
+            </a:r>
+          </a:p>
+          <a:p/>
+          <a:p/>
+          <a:p>
+            <a:r>
+              <a:t>从产业链角度看，人工智能 行业主要由上游设备厂商、</a:t>
+            </a:r>
+          </a:p>
+          <a:p>
+            <a:r>
+              <a:t>中游平台企业以及下游应用厂商组成。</a:t>
+            </a:r>
+          </a:p>
+          <a:p>
+            <a:r>
+              <a:t>华成育卓传媒有限公司 主要位于产业链的 上游 环节。</a:t>
             </a:r>
           </a:p>
           <a:p/>
@@ -3690,17 +3700,17 @@
           <a:p/>
           <a:p>
             <a:r>
-              <a:t>九方信息有限公司 是中国 新能源 行业的重要企业之一。</a:t>
-            </a:r>
-          </a:p>
-          <a:p>
-            <a:r>
-              <a:t>根据华辰资本 资产配置委员会 的研究，该公司成立于 2011 年，</a:t>
-            </a:r>
-          </a:p>
-          <a:p>
-            <a:r>
-              <a:t>目前员工规模约 6198 人。公司近年来持续加大研发投入，</a:t>
+              <a:t>联软网络有限公司 是中国 半导体 行业的重要企业之一。</a:t>
+            </a:r>
+          </a:p>
+          <a:p>
+            <a:r>
+              <a:t>根据华辰资本 投资委员会 的研究，该公司成立于 2012 年，</a:t>
+            </a:r>
+          </a:p>
+          <a:p>
+            <a:r>
+              <a:t>目前员工规模约 5582 人。公司近年来持续加大研发投入，</a:t>
             </a:r>
           </a:p>
           <a:p>
@@ -3712,7 +3722,7 @@
           <a:p/>
           <a:p>
             <a:r>
-              <a:t>从产业链角度看，消费科技 行业主要由上游设备厂商、</a:t>
+              <a:t>从产业链角度看，云计算 行业主要由上游设备厂商、</a:t>
             </a:r>
           </a:p>
           <a:p>
@@ -3722,19 +3732,19 @@
           </a:p>
           <a:p>
             <a:r>
-              <a:t>昂歌信息科技有限公司 主要位于产业链的 中游 环节。</a:t>
-            </a:r>
-          </a:p>
-          <a:p/>
-          <a:p/>
-          <a:p>
-            <a:r>
-              <a:t>根据内部财务模型测算，银嘉信息有限公司 在未来三年</a:t>
-            </a:r>
-          </a:p>
-          <a:p>
-            <a:r>
-              <a:t>收入复合增长率预计可达到 21% 左右。</a:t>
+              <a:t>泰麒麟网络有限公司 主要位于产业链的 中游 环节。</a:t>
+            </a:r>
+          </a:p>
+          <a:p/>
+          <a:p/>
+          <a:p>
+            <a:r>
+              <a:t>根据内部财务模型测算，恩悌网络有限公司 在未来三年</a:t>
+            </a:r>
+          </a:p>
+          <a:p>
+            <a:r>
+              <a:t>收入复合增长率预计可达到 26% 左右。</a:t>
             </a:r>
           </a:p>
           <a:p>
@@ -3801,56 +3811,51 @@
           <a:p/>
           <a:p>
             <a:r>
-              <a:t>天益信息有限公司 是中国 云计算 行业的重要企业之一。</a:t>
-            </a:r>
-          </a:p>
-          <a:p>
-            <a:r>
-              <a:t>根据华辰资本 风险管理部 的研究，该公司成立于 2015 年，</a:t>
-            </a:r>
-          </a:p>
-          <a:p>
-            <a:r>
-              <a:t>目前员工规模约 6900 人。公司近年来持续加大研发投入，</a:t>
-            </a:r>
-          </a:p>
-          <a:p>
-            <a:r>
-              <a:t>在核心技术方面形成了较强的竞争壁垒。</a:t>
-            </a:r>
-          </a:p>
-          <a:p/>
-          <a:p/>
-          <a:p>
-            <a:r>
-              <a:t>华辰资本旗下的 HC Global Macro Fund 在最近的资产配置会议中</a:t>
-            </a:r>
-          </a:p>
-          <a:p>
-            <a:r>
-              <a:t>讨论了 消费科技 行业的投资机会，并对 兰金电子网络有限公司</a:t>
-            </a:r>
-          </a:p>
-          <a:p>
-            <a:r>
-              <a:t>进行了重点评估。</a:t>
-            </a:r>
-          </a:p>
-          <a:p/>
-          <a:p/>
-          <a:p>
-            <a:r>
-              <a:t>风险管理部认为，人工智能 行业仍然面临若干</a:t>
-            </a:r>
-          </a:p>
-          <a:p>
-            <a:r>
-              <a:t>不确定性因素，包括技术迭代风险、政策变化、</a:t>
-            </a:r>
-          </a:p>
-          <a:p>
-            <a:r>
-              <a:t>以及市场竞争加剧等问题。</a:t>
+              <a:t>从产业链角度看，人工智能 行业主要由上游设备厂商、</a:t>
+            </a:r>
+          </a:p>
+          <a:p>
+            <a:r>
+              <a:t>中游平台企业以及下游应用厂商组成。</a:t>
+            </a:r>
+          </a:p>
+          <a:p>
+            <a:r>
+              <a:t>新格林耐特网络有限公司 主要位于产业链的 下游 环节。</a:t>
+            </a:r>
+          </a:p>
+          <a:p/>
+          <a:p/>
+          <a:p>
+            <a:r>
+              <a:t>从产业链角度看，消费科技 行业主要由上游设备厂商、</a:t>
+            </a:r>
+          </a:p>
+          <a:p>
+            <a:r>
+              <a:t>中游平台企业以及下游应用厂商组成。</a:t>
+            </a:r>
+          </a:p>
+          <a:p>
+            <a:r>
+              <a:t>鑫博腾飞信息有限公司 主要位于产业链的 上游 环节。</a:t>
+            </a:r>
+          </a:p>
+          <a:p/>
+          <a:p/>
+          <a:p>
+            <a:r>
+              <a:t>根据内部财务模型测算，佳禾传媒有限公司 在未来三年</a:t>
+            </a:r>
+          </a:p>
+          <a:p>
+            <a:r>
+              <a:t>收入复合增长率预计可达到 35% 左右。</a:t>
+            </a:r>
+          </a:p>
+          <a:p>
+            <a:r>
+              <a:t>该预测基于行业需求增长以及公司产能扩张计划。</a:t>
             </a:r>
           </a:p>
           <a:p/>
@@ -3912,17 +3917,34 @@
           <a:p/>
           <a:p>
             <a:r>
-              <a:t>飞利信科技有限公司 是中国 新能源 行业的重要企业之一。</a:t>
-            </a:r>
-          </a:p>
-          <a:p>
-            <a:r>
-              <a:t>根据华辰资本 风险管理部 的研究，该公司成立于 2005 年，</a:t>
-            </a:r>
-          </a:p>
-          <a:p>
-            <a:r>
-              <a:t>目前员工规模约 4433 人。公司近年来持续加大研发投入，</a:t>
+              <a:t>风险管理部认为，新能源 行业仍然面临若干</a:t>
+            </a:r>
+          </a:p>
+          <a:p>
+            <a:r>
+              <a:t>不确定性因素，包括技术迭代风险、政策变化、</a:t>
+            </a:r>
+          </a:p>
+          <a:p>
+            <a:r>
+              <a:t>以及市场竞争加剧等问题。</a:t>
+            </a:r>
+          </a:p>
+          <a:p/>
+          <a:p/>
+          <a:p>
+            <a:r>
+              <a:t>恩悌网络有限公司 是中国 新能源 行业的重要企业之一。</a:t>
+            </a:r>
+          </a:p>
+          <a:p>
+            <a:r>
+              <a:t>根据华辰资本 风险管理部 的研究，该公司成立于 2011 年，</a:t>
+            </a:r>
+          </a:p>
+          <a:p>
+            <a:r>
+              <a:t>目前员工规模约 7408 人。公司近年来持续加大研发投入，</a:t>
             </a:r>
           </a:p>
           <a:p>
@@ -3934,7 +3956,7 @@
           <a:p/>
           <a:p>
             <a:r>
-              <a:t>风险管理部认为，新能源 行业仍然面临若干</a:t>
+              <a:t>风险管理部认为，人工智能 行业仍然面临若干</a:t>
             </a:r>
           </a:p>
           <a:p>
@@ -3945,28 +3967,6 @@
           <a:p>
             <a:r>
               <a:t>以及市场竞争加剧等问题。</a:t>
-            </a:r>
-          </a:p>
-          <a:p/>
-          <a:p/>
-          <a:p>
-            <a:r>
-              <a:t>迪摩科技有限公司 是中国 人工智能 行业的重要企业之一。</a:t>
-            </a:r>
-          </a:p>
-          <a:p>
-            <a:r>
-              <a:t>根据华辰资本 投资委员会 的研究，该公司成立于 2017 年，</a:t>
-            </a:r>
-          </a:p>
-          <a:p>
-            <a:r>
-              <a:t>目前员工规模约 7554 人。公司近年来持续加大研发投入，</a:t>
-            </a:r>
-          </a:p>
-          <a:p>
-            <a:r>
-              <a:t>在核心技术方面形成了较强的竞争壁垒。</a:t>
             </a:r>
           </a:p>
           <a:p/>
@@ -4028,29 +4028,29 @@
           <a:p/>
           <a:p>
             <a:r>
-              <a:t>风险管理部认为，云计算 行业仍然面临若干</a:t>
-            </a:r>
-          </a:p>
-          <a:p>
-            <a:r>
-              <a:t>不确定性因素，包括技术迭代风险、政策变化、</a:t>
-            </a:r>
-          </a:p>
-          <a:p>
-            <a:r>
-              <a:t>以及市场竞争加剧等问题。</a:t>
-            </a:r>
-          </a:p>
-          <a:p/>
-          <a:p/>
-          <a:p>
-            <a:r>
-              <a:t>华辰资本旗下的 HC Alpha Growth Fund 在最近的资产配置会议中</a:t>
-            </a:r>
-          </a:p>
-          <a:p>
-            <a:r>
-              <a:t>讨论了 云计算 行业的投资机会，并对 国讯网络有限公司</a:t>
+              <a:t>从产业链角度看，半导体 行业主要由上游设备厂商、</a:t>
+            </a:r>
+          </a:p>
+          <a:p>
+            <a:r>
+              <a:t>中游平台企业以及下游应用厂商组成。</a:t>
+            </a:r>
+          </a:p>
+          <a:p>
+            <a:r>
+              <a:t>联软网络有限公司 主要位于产业链的 中游 环节。</a:t>
+            </a:r>
+          </a:p>
+          <a:p/>
+          <a:p/>
+          <a:p>
+            <a:r>
+              <a:t>华辰资本旗下的 HC Energy Transition Fund 在最近的资产配置会议中</a:t>
+            </a:r>
+          </a:p>
+          <a:p>
+            <a:r>
+              <a:t>讨论了 半导体 行业的投资机会，并对 精芯信息有限公司</a:t>
             </a:r>
           </a:p>
           <a:p>
@@ -4062,17 +4062,17 @@
           <a:p/>
           <a:p>
             <a:r>
-              <a:t>从产业链角度看，医疗科技 行业主要由上游设备厂商、</a:t>
-            </a:r>
-          </a:p>
-          <a:p>
-            <a:r>
-              <a:t>中游平台企业以及下游应用厂商组成。</a:t>
-            </a:r>
-          </a:p>
-          <a:p>
-            <a:r>
-              <a:t>富罳信息有限公司 主要位于产业链的 中游 环节。</a:t>
+              <a:t>根据内部财务模型测算，信诚致远网络有限公司 在未来三年</a:t>
+            </a:r>
+          </a:p>
+          <a:p>
+            <a:r>
+              <a:t>收入复合增长率预计可达到 15% 左右。</a:t>
+            </a:r>
+          </a:p>
+          <a:p>
+            <a:r>
+              <a:t>该预测基于行业需求增长以及公司产能扩张计划。</a:t>
             </a:r>
           </a:p>
           <a:p/>
@@ -4134,46 +4134,46 @@
           <a:p/>
           <a:p>
             <a:r>
-              <a:t>华辰资本旗下的 HC Energy Transition Fund 在最近的资产配置会议中</a:t>
-            </a:r>
-          </a:p>
-          <a:p>
-            <a:r>
-              <a:t>讨论了 医疗科技 行业的投资机会，并对 创亿信息有限公司</a:t>
-            </a:r>
-          </a:p>
-          <a:p>
-            <a:r>
-              <a:t>进行了重点评估。</a:t>
-            </a:r>
-          </a:p>
-          <a:p/>
-          <a:p/>
-          <a:p>
-            <a:r>
-              <a:t>华辰资本旗下的 HC Energy Transition Fund 在最近的资产配置会议中</a:t>
-            </a:r>
-          </a:p>
-          <a:p>
-            <a:r>
-              <a:t>讨论了 医疗科技 行业的投资机会，并对 富罳信息有限公司</a:t>
-            </a:r>
-          </a:p>
-          <a:p>
-            <a:r>
-              <a:t>进行了重点评估。</a:t>
-            </a:r>
-          </a:p>
-          <a:p/>
-          <a:p/>
-          <a:p>
-            <a:r>
-              <a:t>根据内部财务模型测算，富罳信息有限公司 在未来三年</a:t>
+              <a:t>从产业链角度看，人工智能 行业主要由上游设备厂商、</a:t>
+            </a:r>
+          </a:p>
+          <a:p>
+            <a:r>
+              <a:t>中游平台企业以及下游应用厂商组成。</a:t>
+            </a:r>
+          </a:p>
+          <a:p>
+            <a:r>
+              <a:t>通际名联科技有限公司 主要位于产业链的 上游 环节。</a:t>
+            </a:r>
+          </a:p>
+          <a:p/>
+          <a:p/>
+          <a:p>
+            <a:r>
+              <a:t>根据内部财务模型测算，昊嘉科技有限公司 在未来三年</a:t>
             </a:r>
           </a:p>
           <a:p>
             <a:r>
               <a:t>收入复合增长率预计可达到 11% 左右。</a:t>
+            </a:r>
+          </a:p>
+          <a:p>
+            <a:r>
+              <a:t>该预测基于行业需求增长以及公司产能扩张计划。</a:t>
+            </a:r>
+          </a:p>
+          <a:p/>
+          <a:p/>
+          <a:p>
+            <a:r>
+              <a:t>根据内部财务模型测算，雨林木风计算机科技有限公司 在未来三年</a:t>
+            </a:r>
+          </a:p>
+          <a:p>
+            <a:r>
+              <a:t>收入复合增长率预计可达到 19% 左右。</a:t>
             </a:r>
           </a:p>
           <a:p>
@@ -4240,24 +4240,7 @@
           <a:p/>
           <a:p>
             <a:r>
-              <a:t>风险管理部认为，人工智能 行业仍然面临若干</a:t>
-            </a:r>
-          </a:p>
-          <a:p>
-            <a:r>
-              <a:t>不确定性因素，包括技术迭代风险、政策变化、</a:t>
-            </a:r>
-          </a:p>
-          <a:p>
-            <a:r>
-              <a:t>以及市场竞争加剧等问题。</a:t>
-            </a:r>
-          </a:p>
-          <a:p/>
-          <a:p/>
-          <a:p>
-            <a:r>
-              <a:t>从产业链角度看，人工智能 行业主要由上游设备厂商、</a:t>
+              <a:t>从产业链角度看，新能源 行业主要由上游设备厂商、</a:t>
             </a:r>
           </a:p>
           <a:p>
@@ -4267,29 +4250,41 @@
           </a:p>
           <a:p>
             <a:r>
-              <a:t>雨林木风计算机科技有限公司 主要位于产业链的 中游 环节。</a:t>
-            </a:r>
-          </a:p>
-          <a:p/>
-          <a:p/>
-          <a:p>
-            <a:r>
-              <a:t>和泰科技有限公司 是中国 人工智能 行业的重要企业之一。</a:t>
-            </a:r>
-          </a:p>
-          <a:p>
-            <a:r>
-              <a:t>根据华辰资本 投资策略部 的研究，该公司成立于 2008 年，</a:t>
-            </a:r>
-          </a:p>
-          <a:p>
-            <a:r>
-              <a:t>目前员工规模约 6443 人。公司近年来持续加大研发投入，</a:t>
-            </a:r>
-          </a:p>
-          <a:p>
-            <a:r>
-              <a:t>在核心技术方面形成了较强的竞争壁垒。</a:t>
+              <a:t>恩悌网络有限公司 主要位于产业链的 上游 环节。</a:t>
+            </a:r>
+          </a:p>
+          <a:p/>
+          <a:p/>
+          <a:p>
+            <a:r>
+              <a:t>根据内部财务模型测算，鑫博腾飞信息有限公司 在未来三年</a:t>
+            </a:r>
+          </a:p>
+          <a:p>
+            <a:r>
+              <a:t>收入复合增长率预计可达到 30% 左右。</a:t>
+            </a:r>
+          </a:p>
+          <a:p>
+            <a:r>
+              <a:t>该预测基于行业需求增长以及公司产能扩张计划。</a:t>
+            </a:r>
+          </a:p>
+          <a:p/>
+          <a:p/>
+          <a:p>
+            <a:r>
+              <a:t>华辰资本旗下的 HC Alpha Growth Fund 在最近的资产配置会议中</a:t>
+            </a:r>
+          </a:p>
+          <a:p>
+            <a:r>
+              <a:t>讨论了 机器人 行业的投资机会，并对 通际名联网络有限公司</a:t>
+            </a:r>
+          </a:p>
+          <a:p>
+            <a:r>
+              <a:t>进行了重点评估。</a:t>
             </a:r>
           </a:p>
           <a:p/>
@@ -4351,17 +4346,17 @@
           <a:p/>
           <a:p>
             <a:r>
-              <a:t>易动力科技有限公司 是中国 云计算 行业的重要企业之一。</a:t>
-            </a:r>
-          </a:p>
-          <a:p>
-            <a:r>
-              <a:t>根据华辰资本 量化研究部 的研究，该公司成立于 2014 年，</a:t>
-            </a:r>
-          </a:p>
-          <a:p>
-            <a:r>
-              <a:t>目前员工规模约 1450 人。公司近年来持续加大研发投入，</a:t>
+              <a:t>图龙信息传媒有限公司 是中国 机器人 行业的重要企业之一。</a:t>
+            </a:r>
+          </a:p>
+          <a:p>
+            <a:r>
+              <a:t>根据华辰资本 资产配置委员会 的研究，该公司成立于 2007 年，</a:t>
+            </a:r>
+          </a:p>
+          <a:p>
+            <a:r>
+              <a:t>目前员工规模约 2000 人。公司近年来持续加大研发投入，</a:t>
             </a:r>
           </a:p>
           <a:p>
@@ -4373,17 +4368,17 @@
           <a:p/>
           <a:p>
             <a:r>
-              <a:t>信诚致远传媒有限公司 是中国 人工智能 行业的重要企业之一。</a:t>
-            </a:r>
-          </a:p>
-          <a:p>
-            <a:r>
-              <a:t>根据华辰资本 投资策略部 的研究，该公司成立于 2015 年，</a:t>
-            </a:r>
-          </a:p>
-          <a:p>
-            <a:r>
-              <a:t>目前员工规模约 5674 人。公司近年来持续加大研发投入，</a:t>
+              <a:t>艾提科信科技有限公司 是中国 云计算 行业的重要企业之一。</a:t>
+            </a:r>
+          </a:p>
+          <a:p>
+            <a:r>
+              <a:t>根据华辰资本 投资委员会 的研究，该公司成立于 2006 年，</a:t>
+            </a:r>
+          </a:p>
+          <a:p>
+            <a:r>
+              <a:t>目前员工规模约 3804 人。公司近年来持续加大研发投入，</a:t>
             </a:r>
           </a:p>
           <a:p>
@@ -4395,17 +4390,17 @@
           <a:p/>
           <a:p>
             <a:r>
-              <a:t>根据内部财务模型测算，创联世纪科技有限公司 在未来三年</a:t>
-            </a:r>
-          </a:p>
-          <a:p>
-            <a:r>
-              <a:t>收入复合增长率预计可达到 28% 左右。</a:t>
-            </a:r>
-          </a:p>
-          <a:p>
-            <a:r>
-              <a:t>该预测基于行业需求增长以及公司产能扩张计划。</a:t>
+              <a:t>华辰资本旗下的 HC Quant Arbitrage Fund 在最近的资产配置会议中</a:t>
+            </a:r>
+          </a:p>
+          <a:p>
+            <a:r>
+              <a:t>讨论了 云计算 行业的投资机会，并对 佳禾传媒有限公司</a:t>
+            </a:r>
+          </a:p>
+          <a:p>
+            <a:r>
+              <a:t>进行了重点评估。</a:t>
             </a:r>
           </a:p>
           <a:p/>
@@ -4467,12 +4462,12 @@
           <a:p/>
           <a:p>
             <a:r>
-              <a:t>根据内部财务模型测算，东方峻景传媒有限公司 在未来三年</a:t>
-            </a:r>
-          </a:p>
-          <a:p>
-            <a:r>
-              <a:t>收入复合增长率预计可达到 29% 左右。</a:t>
+              <a:t>根据内部财务模型测算，新格林耐特网络有限公司 在未来三年</a:t>
+            </a:r>
+          </a:p>
+          <a:p>
+            <a:r>
+              <a:t>收入复合增长率预计可达到 35% 左右。</a:t>
             </a:r>
           </a:p>
           <a:p>
@@ -4484,7 +4479,24 @@
           <a:p/>
           <a:p>
             <a:r>
-              <a:t>从产业链角度看，消费科技 行业主要由上游设备厂商、</a:t>
+              <a:t>根据内部财务模型测算，创联世纪信息有限公司 在未来三年</a:t>
+            </a:r>
+          </a:p>
+          <a:p>
+            <a:r>
+              <a:t>收入复合增长率预计可达到 18% 左右。</a:t>
+            </a:r>
+          </a:p>
+          <a:p>
+            <a:r>
+              <a:t>该预测基于行业需求增长以及公司产能扩张计划。</a:t>
+            </a:r>
+          </a:p>
+          <a:p/>
+          <a:p/>
+          <a:p>
+            <a:r>
+              <a:t>从产业链角度看，机器人 行业主要由上游设备厂商、</a:t>
             </a:r>
           </a:p>
           <a:p>
@@ -4494,24 +4506,7 @@
           </a:p>
           <a:p>
             <a:r>
-              <a:t>精芯信息有限公司 主要位于产业链的 上游 环节。</a:t>
-            </a:r>
-          </a:p>
-          <a:p/>
-          <a:p/>
-          <a:p>
-            <a:r>
-              <a:t>风险管理部认为，机器人 行业仍然面临若干</a:t>
-            </a:r>
-          </a:p>
-          <a:p>
-            <a:r>
-              <a:t>不确定性因素，包括技术迭代风险、政策变化、</a:t>
-            </a:r>
-          </a:p>
-          <a:p>
-            <a:r>
-              <a:t>以及市场竞争加剧等问题。</a:t>
+              <a:t>通际名联网络有限公司 主要位于产业链的 中游 环节。</a:t>
             </a:r>
           </a:p>
           <a:p/>
@@ -4573,29 +4568,24 @@
           <a:p/>
           <a:p>
             <a:r>
-              <a:t>和泰传媒有限公司 是中国 消费科技 行业的重要企业之一。</a:t>
-            </a:r>
-          </a:p>
-          <a:p>
-            <a:r>
-              <a:t>根据华辰资本 风险管理部 的研究，该公司成立于 2020 年，</a:t>
-            </a:r>
-          </a:p>
-          <a:p>
-            <a:r>
-              <a:t>目前员工规模约 7048 人。公司近年来持续加大研发投入，</a:t>
-            </a:r>
-          </a:p>
-          <a:p>
-            <a:r>
-              <a:t>在核心技术方面形成了较强的竞争壁垒。</a:t>
-            </a:r>
-          </a:p>
-          <a:p/>
-          <a:p/>
-          <a:p>
-            <a:r>
-              <a:t>风险管理部认为，云计算 行业仍然面临若干</a:t>
+              <a:t>根据内部财务模型测算，华成育卓科技有限公司 在未来三年</a:t>
+            </a:r>
+          </a:p>
+          <a:p>
+            <a:r>
+              <a:t>收入复合增长率预计可达到 17% 左右。</a:t>
+            </a:r>
+          </a:p>
+          <a:p>
+            <a:r>
+              <a:t>该预测基于行业需求增长以及公司产能扩张计划。</a:t>
+            </a:r>
+          </a:p>
+          <a:p/>
+          <a:p/>
+          <a:p>
+            <a:r>
+              <a:t>风险管理部认为，半导体 行业仍然面临若干</a:t>
             </a:r>
           </a:p>
           <a:p>
@@ -4612,17 +4602,17 @@
           <a:p/>
           <a:p>
             <a:r>
-              <a:t>根据内部财务模型测算，精芯科技有限公司 在未来三年</a:t>
-            </a:r>
-          </a:p>
-          <a:p>
-            <a:r>
-              <a:t>收入复合增长率预计可达到 15% 左右。</a:t>
-            </a:r>
-          </a:p>
-          <a:p>
-            <a:r>
-              <a:t>该预测基于行业需求增长以及公司产能扩张计划。</a:t>
+              <a:t>华辰资本旗下的 HC Global Macro Fund 在最近的资产配置会议中</a:t>
+            </a:r>
+          </a:p>
+          <a:p>
+            <a:r>
+              <a:t>讨论了 新能源 行业的投资机会，并对 创汇传媒有限公司</a:t>
+            </a:r>
+          </a:p>
+          <a:p>
+            <a:r>
+              <a:t>进行了重点评估。</a:t>
             </a:r>
           </a:p>
           <a:p/>
@@ -4684,7 +4674,7 @@
           <a:p/>
           <a:p>
             <a:r>
-              <a:t>风险管理部认为，医疗科技 行业仍然面临若干</a:t>
+              <a:t>风险管理部认为，人工智能 行业仍然面临若干</a:t>
             </a:r>
           </a:p>
           <a:p>
@@ -4701,34 +4691,34 @@
           <a:p/>
           <a:p>
             <a:r>
-              <a:t>根据内部财务模型测算，浦华众城科技有限公司 在未来三年</a:t>
-            </a:r>
-          </a:p>
-          <a:p>
-            <a:r>
-              <a:t>收入复合增长率预计可达到 10% 左右。</a:t>
-            </a:r>
-          </a:p>
-          <a:p>
-            <a:r>
-              <a:t>该预测基于行业需求增长以及公司产能扩张计划。</a:t>
-            </a:r>
-          </a:p>
-          <a:p/>
-          <a:p/>
-          <a:p>
-            <a:r>
-              <a:t>根据内部财务模型测算，华远软件信息有限公司 在未来三年</a:t>
-            </a:r>
-          </a:p>
-          <a:p>
-            <a:r>
-              <a:t>收入复合增长率预计可达到 33% 左右。</a:t>
-            </a:r>
-          </a:p>
-          <a:p>
-            <a:r>
-              <a:t>该预测基于行业需求增长以及公司产能扩张计划。</a:t>
+              <a:t>从产业链角度看，半导体 行业主要由上游设备厂商、</a:t>
+            </a:r>
+          </a:p>
+          <a:p>
+            <a:r>
+              <a:t>中游平台企业以及下游应用厂商组成。</a:t>
+            </a:r>
+          </a:p>
+          <a:p>
+            <a:r>
+              <a:t>雨林木风计算机科技有限公司 主要位于产业链的 中游 环节。</a:t>
+            </a:r>
+          </a:p>
+          <a:p/>
+          <a:p/>
+          <a:p>
+            <a:r>
+              <a:t>华辰资本旗下的 HC Global Macro Fund 在最近的资产配置会议中</a:t>
+            </a:r>
+          </a:p>
+          <a:p>
+            <a:r>
+              <a:t>讨论了 半导体 行业的投资机会，并对 信诚致远网络有限公司</a:t>
+            </a:r>
+          </a:p>
+          <a:p>
+            <a:r>
+              <a:t>进行了重点评估。</a:t>
             </a:r>
           </a:p>
           <a:p/>
